--- a/отчет.pptx
+++ b/отчет.pptx
@@ -111,6 +111,11 @@
       </a:defRPr>
     </a:lvl9pPr>
   </p:defaultTextStyle>
+  <p:extLst>
+    <p:ext uri="{EFAFB233-063F-42B5-8137-9DF3F51BA10A}">
+      <p15:sldGuideLst xmlns:p15="http://schemas.microsoft.com/office/powerpoint/2012/main"/>
+    </p:ext>
+  </p:extLst>
 </p:presentation>
 </file>
 
@@ -870,7 +875,7 @@
           <a:p>
             <a:fld id="{E42F00C7-285E-4A74-B7B8-87397FB8E33B}" type="datetimeFigureOut">
               <a:rPr lang="ru-RU" smtClean="0"/>
-              <a:t>02.04.2026</a:t>
+              <a:t>04.04.2026</a:t>
             </a:fld>
             <a:endParaRPr lang="ru-RU"/>
           </a:p>
@@ -1040,7 +1045,7 @@
           <a:p>
             <a:fld id="{E42F00C7-285E-4A74-B7B8-87397FB8E33B}" type="datetimeFigureOut">
               <a:rPr lang="ru-RU" smtClean="0"/>
-              <a:t>02.04.2026</a:t>
+              <a:t>04.04.2026</a:t>
             </a:fld>
             <a:endParaRPr lang="ru-RU"/>
           </a:p>
@@ -1220,7 +1225,7 @@
           <a:p>
             <a:fld id="{E42F00C7-285E-4A74-B7B8-87397FB8E33B}" type="datetimeFigureOut">
               <a:rPr lang="ru-RU" smtClean="0"/>
-              <a:t>02.04.2026</a:t>
+              <a:t>04.04.2026</a:t>
             </a:fld>
             <a:endParaRPr lang="ru-RU"/>
           </a:p>
@@ -1500,7 +1505,7 @@
           <a:p>
             <a:fld id="{E42F00C7-285E-4A74-B7B8-87397FB8E33B}" type="datetimeFigureOut">
               <a:rPr lang="ru-RU" smtClean="0"/>
-              <a:t>02.04.2026</a:t>
+              <a:t>04.04.2026</a:t>
             </a:fld>
             <a:endParaRPr lang="ru-RU"/>
           </a:p>
@@ -1746,7 +1751,7 @@
           <a:p>
             <a:fld id="{E42F00C7-285E-4A74-B7B8-87397FB8E33B}" type="datetimeFigureOut">
               <a:rPr lang="ru-RU" smtClean="0"/>
-              <a:t>02.04.2026</a:t>
+              <a:t>04.04.2026</a:t>
             </a:fld>
             <a:endParaRPr lang="ru-RU"/>
           </a:p>
@@ -1978,7 +1983,7 @@
           <a:p>
             <a:fld id="{E42F00C7-285E-4A74-B7B8-87397FB8E33B}" type="datetimeFigureOut">
               <a:rPr lang="ru-RU" smtClean="0"/>
-              <a:t>02.04.2026</a:t>
+              <a:t>04.04.2026</a:t>
             </a:fld>
             <a:endParaRPr lang="ru-RU"/>
           </a:p>
@@ -2345,7 +2350,7 @@
           <a:p>
             <a:fld id="{E42F00C7-285E-4A74-B7B8-87397FB8E33B}" type="datetimeFigureOut">
               <a:rPr lang="ru-RU" smtClean="0"/>
-              <a:t>02.04.2026</a:t>
+              <a:t>04.04.2026</a:t>
             </a:fld>
             <a:endParaRPr lang="ru-RU"/>
           </a:p>
@@ -2463,7 +2468,7 @@
           <a:p>
             <a:fld id="{E42F00C7-285E-4A74-B7B8-87397FB8E33B}" type="datetimeFigureOut">
               <a:rPr lang="ru-RU" smtClean="0"/>
-              <a:t>02.04.2026</a:t>
+              <a:t>04.04.2026</a:t>
             </a:fld>
             <a:endParaRPr lang="ru-RU"/>
           </a:p>
@@ -2558,7 +2563,7 @@
           <a:p>
             <a:fld id="{E42F00C7-285E-4A74-B7B8-87397FB8E33B}" type="datetimeFigureOut">
               <a:rPr lang="ru-RU" smtClean="0"/>
-              <a:t>02.04.2026</a:t>
+              <a:t>04.04.2026</a:t>
             </a:fld>
             <a:endParaRPr lang="ru-RU"/>
           </a:p>
@@ -2835,7 +2840,7 @@
           <a:p>
             <a:fld id="{E42F00C7-285E-4A74-B7B8-87397FB8E33B}" type="datetimeFigureOut">
               <a:rPr lang="ru-RU" smtClean="0"/>
-              <a:t>02.04.2026</a:t>
+              <a:t>04.04.2026</a:t>
             </a:fld>
             <a:endParaRPr lang="ru-RU"/>
           </a:p>
@@ -3092,7 +3097,7 @@
           <a:p>
             <a:fld id="{E42F00C7-285E-4A74-B7B8-87397FB8E33B}" type="datetimeFigureOut">
               <a:rPr lang="ru-RU" smtClean="0"/>
-              <a:t>02.04.2026</a:t>
+              <a:t>04.04.2026</a:t>
             </a:fld>
             <a:endParaRPr lang="ru-RU"/>
           </a:p>
@@ -3305,7 +3310,7 @@
           <a:p>
             <a:fld id="{E42F00C7-285E-4A74-B7B8-87397FB8E33B}" type="datetimeFigureOut">
               <a:rPr lang="ru-RU" smtClean="0"/>
-              <a:t>02.04.2026</a:t>
+              <a:t>04.04.2026</a:t>
             </a:fld>
             <a:endParaRPr lang="ru-RU"/>
           </a:p>
@@ -3743,8 +3748,8 @@
         </p:nvSpPr>
         <p:spPr>
           <a:xfrm rot="5400000">
-            <a:off x="-1566102" y="1668342"/>
-            <a:ext cx="10691815" cy="7559676"/>
+            <a:off x="-1824070" y="1576389"/>
+            <a:ext cx="11207752" cy="7559676"/>
           </a:xfrm>
           <a:prstGeom prst="rect">
             <a:avLst/>
@@ -5283,72 +5288,53 @@
           <a:chExt cx="0" cy="0"/>
         </a:xfrm>
       </p:grpSpPr>
-      <p:pic>
-        <p:nvPicPr>
-          <p:cNvPr id="2" name="Image 0" descr="preencoded.png">
-            <a:extLst>
-              <a:ext uri="{FF2B5EF4-FFF2-40B4-BE49-F238E27FC236}">
-                <a16:creationId xmlns:a16="http://schemas.microsoft.com/office/drawing/2014/main" id="{91CE66DE-757E-4F4F-2B62-0D4BE6D8088E}"/>
-              </a:ext>
-            </a:extLst>
-          </p:cNvPr>
-          <p:cNvPicPr>
-            <a:picLocks noChangeAspect="1"/>
-          </p:cNvPicPr>
-          <p:nvPr/>
-        </p:nvPicPr>
-        <p:blipFill>
-          <a:blip r:embed="rId3"/>
-          <a:stretch>
-            <a:fillRect/>
-          </a:stretch>
-        </p:blipFill>
-        <p:spPr>
-          <a:xfrm rot="5400000">
-            <a:off x="-2939904" y="1363356"/>
-            <a:ext cx="13439424" cy="7559676"/>
-          </a:xfrm>
-          <a:prstGeom prst="rect">
-            <a:avLst/>
-          </a:prstGeom>
-        </p:spPr>
-      </p:pic>
-      <p:sp>
-        <p:nvSpPr>
-          <p:cNvPr id="3" name="Shape 0">
-            <a:extLst>
-              <a:ext uri="{FF2B5EF4-FFF2-40B4-BE49-F238E27FC236}">
-                <a16:creationId xmlns:a16="http://schemas.microsoft.com/office/drawing/2014/main" id="{02A01901-2990-CAF8-E380-BEA4681F307B}"/>
-              </a:ext>
-            </a:extLst>
-          </p:cNvPr>
-          <p:cNvSpPr/>
-          <p:nvPr/>
-        </p:nvSpPr>
-        <p:spPr>
-          <a:xfrm rot="5400000">
-            <a:off x="-1566071" y="1566070"/>
-            <a:ext cx="10691815" cy="7559676"/>
+      <p:sp>
+        <p:nvSpPr>
+          <p:cNvPr id="16" name="Прямоугольник 15">
+            <a:extLst>
+              <a:ext uri="{FF2B5EF4-FFF2-40B4-BE49-F238E27FC236}">
+                <a16:creationId xmlns:a16="http://schemas.microsoft.com/office/drawing/2014/main" id="{1C5019D8-E970-683C-ACA9-BC648A9B4262}"/>
+              </a:ext>
+            </a:extLst>
+          </p:cNvPr>
+          <p:cNvSpPr/>
+          <p:nvPr/>
+        </p:nvSpPr>
+        <p:spPr>
+          <a:xfrm>
+            <a:off x="6254750" y="9956800"/>
+            <a:ext cx="1473200" cy="735013"/>
           </a:xfrm>
           <a:prstGeom prst="rect">
             <a:avLst/>
           </a:prstGeom>
           <a:solidFill>
-            <a:srgbClr val="FFFCFA">
-              <a:alpha val="85000"/>
-            </a:srgbClr>
+            <a:schemeClr val="lt1"/>
           </a:solidFill>
-          <a:ln/>
-        </p:spPr>
-        <p:txBody>
-          <a:bodyPr/>
-          <a:lstStyle/>
-          <a:p>
-            <a:endParaRPr lang="ru-RU" sz="930" dirty="0">
-              <a:latin typeface="Open Sans" panose="020B0606030504020204" pitchFamily="34" charset="0"/>
-              <a:ea typeface="Open Sans" panose="020B0606030504020204" pitchFamily="34" charset="0"/>
-              <a:cs typeface="Open Sans" panose="020B0606030504020204" pitchFamily="34" charset="0"/>
-            </a:endParaRPr>
+          <a:ln>
+            <a:noFill/>
+          </a:ln>
+        </p:spPr>
+        <p:style>
+          <a:lnRef idx="2">
+            <a:schemeClr val="accent6"/>
+          </a:lnRef>
+          <a:fillRef idx="1">
+            <a:schemeClr val="lt1"/>
+          </a:fillRef>
+          <a:effectRef idx="0">
+            <a:schemeClr val="accent6"/>
+          </a:effectRef>
+          <a:fontRef idx="minor">
+            <a:schemeClr val="dk1"/>
+          </a:fontRef>
+        </p:style>
+        <p:txBody>
+          <a:bodyPr rtlCol="0" anchor="ctr"/>
+          <a:lstStyle/>
+          <a:p>
+            <a:pPr algn="ctr"/>
+            <a:endParaRPr lang="ru-RU"/>
           </a:p>
         </p:txBody>
       </p:sp>
@@ -5493,8 +5479,8 @@
         </p:nvSpPr>
         <p:spPr>
           <a:xfrm>
-            <a:off x="199794" y="1822965"/>
-            <a:ext cx="7200180" cy="1405737"/>
+            <a:off x="275222" y="1862926"/>
+            <a:ext cx="7129519" cy="1405737"/>
           </a:xfrm>
           <a:prstGeom prst="roundRect">
             <a:avLst>
@@ -5525,45 +5511,6 @@
       </p:sp>
       <p:sp>
         <p:nvSpPr>
-          <p:cNvPr id="33" name="Shape 3">
-            <a:extLst>
-              <a:ext uri="{FF2B5EF4-FFF2-40B4-BE49-F238E27FC236}">
-                <a16:creationId xmlns:a16="http://schemas.microsoft.com/office/drawing/2014/main" id="{E2259DF5-7EF5-5437-C700-253B2D0CEA58}"/>
-              </a:ext>
-            </a:extLst>
-          </p:cNvPr>
-          <p:cNvSpPr/>
-          <p:nvPr/>
-        </p:nvSpPr>
-        <p:spPr>
-          <a:xfrm>
-            <a:off x="199794" y="1822966"/>
-            <a:ext cx="125866" cy="1405737"/>
-          </a:xfrm>
-          <a:prstGeom prst="roundRect">
-            <a:avLst>
-              <a:gd name="adj" fmla="val 85050"/>
-            </a:avLst>
-          </a:prstGeom>
-          <a:solidFill>
-            <a:srgbClr val="835E54"/>
-          </a:solidFill>
-          <a:ln/>
-        </p:spPr>
-        <p:txBody>
-          <a:bodyPr/>
-          <a:lstStyle/>
-          <a:p>
-            <a:endParaRPr lang="ru-RU">
-              <a:latin typeface="Open Sans" panose="020B0606030504020204" pitchFamily="34" charset="0"/>
-              <a:ea typeface="Open Sans" panose="020B0606030504020204" pitchFamily="34" charset="0"/>
-              <a:cs typeface="Open Sans" panose="020B0606030504020204" pitchFamily="34" charset="0"/>
-            </a:endParaRPr>
-          </a:p>
-        </p:txBody>
-      </p:sp>
-      <p:sp>
-        <p:nvSpPr>
           <p:cNvPr id="34" name="Text 4">
             <a:extLst>
               <a:ext uri="{FF2B5EF4-FFF2-40B4-BE49-F238E27FC236}">
@@ -5576,7 +5523,7 @@
         </p:nvSpPr>
         <p:spPr>
           <a:xfrm>
-            <a:off x="399344" y="1961556"/>
+            <a:off x="560302" y="2007669"/>
             <a:ext cx="6533482" cy="244477"/>
           </a:xfrm>
           <a:prstGeom prst="rect">
@@ -5627,8 +5574,8 @@
         </p:nvSpPr>
         <p:spPr>
           <a:xfrm>
-            <a:off x="446025" y="2243059"/>
-            <a:ext cx="6951343" cy="526174"/>
+            <a:off x="588019" y="2261363"/>
+            <a:ext cx="6722310" cy="478565"/>
           </a:xfrm>
           <a:prstGeom prst="rect">
             <a:avLst/>
@@ -5700,7 +5647,7 @@
         </p:nvSpPr>
         <p:spPr>
           <a:xfrm>
-            <a:off x="5658945" y="2983944"/>
+            <a:off x="5734373" y="3023905"/>
             <a:ext cx="1592325" cy="171210"/>
           </a:xfrm>
           <a:prstGeom prst="rect">
@@ -5752,7 +5699,7 @@
         <p:spPr>
           <a:xfrm>
             <a:off x="249346" y="3392403"/>
-            <a:ext cx="7200180" cy="1636797"/>
+            <a:ext cx="7155395" cy="1665793"/>
           </a:xfrm>
           <a:prstGeom prst="roundRect">
             <a:avLst>
@@ -5834,7 +5781,7 @@
         </p:nvSpPr>
         <p:spPr>
           <a:xfrm>
-            <a:off x="433655" y="3530994"/>
+            <a:off x="591385" y="3530994"/>
             <a:ext cx="6533505" cy="244476"/>
           </a:xfrm>
           <a:prstGeom prst="rect">
@@ -5885,8 +5832,8 @@
         </p:nvSpPr>
         <p:spPr>
           <a:xfrm>
-            <a:off x="470970" y="3775470"/>
-            <a:ext cx="6901452" cy="609250"/>
+            <a:off x="560302" y="3830396"/>
+            <a:ext cx="6727729" cy="609250"/>
           </a:xfrm>
           <a:prstGeom prst="rect">
             <a:avLst/>
@@ -5980,7 +5927,7 @@
         </p:nvSpPr>
         <p:spPr>
           <a:xfrm>
-            <a:off x="3939315" y="4766112"/>
+            <a:off x="3939196" y="4793646"/>
             <a:ext cx="3576666" cy="176044"/>
           </a:xfrm>
           <a:prstGeom prst="rect">
@@ -6031,8 +5978,8 @@
         </p:nvSpPr>
         <p:spPr>
           <a:xfrm>
-            <a:off x="264928" y="5235764"/>
-            <a:ext cx="7200180" cy="1484842"/>
+            <a:off x="272944" y="5273506"/>
+            <a:ext cx="7150181" cy="1484842"/>
           </a:xfrm>
           <a:prstGeom prst="roundRect">
             <a:avLst>
@@ -6063,45 +6010,6 @@
       </p:sp>
       <p:sp>
         <p:nvSpPr>
-          <p:cNvPr id="43" name="Shape 13">
-            <a:extLst>
-              <a:ext uri="{FF2B5EF4-FFF2-40B4-BE49-F238E27FC236}">
-                <a16:creationId xmlns:a16="http://schemas.microsoft.com/office/drawing/2014/main" id="{4431B3EB-D8F6-0045-E902-6282E12E23A9}"/>
-              </a:ext>
-            </a:extLst>
-          </p:cNvPr>
-          <p:cNvSpPr/>
-          <p:nvPr/>
-        </p:nvSpPr>
-        <p:spPr>
-          <a:xfrm>
-            <a:off x="249688" y="5235764"/>
-            <a:ext cx="125866" cy="1484842"/>
-          </a:xfrm>
-          <a:prstGeom prst="roundRect">
-            <a:avLst>
-              <a:gd name="adj" fmla="val 85050"/>
-            </a:avLst>
-          </a:prstGeom>
-          <a:solidFill>
-            <a:srgbClr val="835E54"/>
-          </a:solidFill>
-          <a:ln/>
-        </p:spPr>
-        <p:txBody>
-          <a:bodyPr/>
-          <a:lstStyle/>
-          <a:p>
-            <a:endParaRPr lang="ru-RU">
-              <a:latin typeface="Open Sans" panose="020B0606030504020204" pitchFamily="34" charset="0"/>
-              <a:ea typeface="Open Sans" panose="020B0606030504020204" pitchFamily="34" charset="0"/>
-              <a:cs typeface="Open Sans" panose="020B0606030504020204" pitchFamily="34" charset="0"/>
-            </a:endParaRPr>
-          </a:p>
-        </p:txBody>
-      </p:sp>
-      <p:sp>
-        <p:nvSpPr>
           <p:cNvPr id="44" name="Text 14">
             <a:extLst>
               <a:ext uri="{FF2B5EF4-FFF2-40B4-BE49-F238E27FC236}">
@@ -6114,7 +6022,7 @@
         </p:nvSpPr>
         <p:spPr>
           <a:xfrm>
-            <a:off x="449237" y="5374352"/>
+            <a:off x="615154" y="5416852"/>
             <a:ext cx="6533482" cy="298036"/>
           </a:xfrm>
           <a:prstGeom prst="rect">
@@ -6165,8 +6073,8 @@
         </p:nvSpPr>
         <p:spPr>
           <a:xfrm>
-            <a:off x="446025" y="5619265"/>
-            <a:ext cx="6958716" cy="801016"/>
+            <a:off x="590499" y="5681275"/>
+            <a:ext cx="6736199" cy="801016"/>
           </a:xfrm>
           <a:prstGeom prst="rect">
             <a:avLst/>
@@ -6238,8 +6146,8 @@
         </p:nvSpPr>
         <p:spPr>
           <a:xfrm>
-            <a:off x="4551768" y="6484558"/>
-            <a:ext cx="6533482" cy="114431"/>
+            <a:off x="4659630" y="6520369"/>
+            <a:ext cx="2784487" cy="155742"/>
           </a:xfrm>
           <a:prstGeom prst="rect">
             <a:avLst/>
@@ -6285,7 +6193,7 @@
         </p:nvSpPr>
         <p:spPr>
           <a:xfrm>
-            <a:off x="314927" y="6861309"/>
+            <a:off x="251952" y="6929293"/>
             <a:ext cx="7150181" cy="1371457"/>
           </a:xfrm>
           <a:prstGeom prst="roundRect">
@@ -6329,8 +6237,8 @@
         </p:nvSpPr>
         <p:spPr>
           <a:xfrm>
-            <a:off x="299685" y="6861309"/>
-            <a:ext cx="93465" cy="1330191"/>
+            <a:off x="236710" y="6929293"/>
+            <a:ext cx="93465" cy="1386974"/>
           </a:xfrm>
           <a:prstGeom prst="roundRect">
             <a:avLst>
@@ -6368,7 +6276,7 @@
         </p:nvSpPr>
         <p:spPr>
           <a:xfrm>
-            <a:off x="499236" y="6999898"/>
+            <a:off x="582974" y="7084059"/>
             <a:ext cx="6488135" cy="346336"/>
           </a:xfrm>
           <a:prstGeom prst="rect">
@@ -6419,7 +6327,7 @@
         </p:nvSpPr>
         <p:spPr>
           <a:xfrm>
-            <a:off x="499236" y="7269906"/>
+            <a:off x="560302" y="7359260"/>
             <a:ext cx="6859786" cy="797854"/>
           </a:xfrm>
           <a:prstGeom prst="rect">
@@ -7415,6 +7323,84 @@
               <a:t>Низкий уровень угрозы</a:t>
             </a:r>
             <a:endParaRPr lang="en-US" sz="950" dirty="0">
+              <a:latin typeface="Open Sans" panose="020B0606030504020204" pitchFamily="34" charset="0"/>
+              <a:ea typeface="Open Sans" panose="020B0606030504020204" pitchFamily="34" charset="0"/>
+              <a:cs typeface="Open Sans" panose="020B0606030504020204" pitchFamily="34" charset="0"/>
+            </a:endParaRPr>
+          </a:p>
+        </p:txBody>
+      </p:sp>
+      <p:sp>
+        <p:nvSpPr>
+          <p:cNvPr id="72" name="Shape 8">
+            <a:extLst>
+              <a:ext uri="{FF2B5EF4-FFF2-40B4-BE49-F238E27FC236}">
+                <a16:creationId xmlns:a16="http://schemas.microsoft.com/office/drawing/2014/main" id="{D65461D0-BB54-B34B-643A-4E4F38F90C3F}"/>
+              </a:ext>
+            </a:extLst>
+          </p:cNvPr>
+          <p:cNvSpPr/>
+          <p:nvPr/>
+        </p:nvSpPr>
+        <p:spPr>
+          <a:xfrm>
+            <a:off x="249346" y="1862926"/>
+            <a:ext cx="88714" cy="1417123"/>
+          </a:xfrm>
+          <a:prstGeom prst="roundRect">
+            <a:avLst>
+              <a:gd name="adj" fmla="val 85050"/>
+            </a:avLst>
+          </a:prstGeom>
+          <a:solidFill>
+            <a:srgbClr val="835E54"/>
+          </a:solidFill>
+          <a:ln/>
+        </p:spPr>
+        <p:txBody>
+          <a:bodyPr/>
+          <a:lstStyle/>
+          <a:p>
+            <a:endParaRPr lang="ru-RU">
+              <a:latin typeface="Open Sans" panose="020B0606030504020204" pitchFamily="34" charset="0"/>
+              <a:ea typeface="Open Sans" panose="020B0606030504020204" pitchFamily="34" charset="0"/>
+              <a:cs typeface="Open Sans" panose="020B0606030504020204" pitchFamily="34" charset="0"/>
+            </a:endParaRPr>
+          </a:p>
+        </p:txBody>
+      </p:sp>
+      <p:sp>
+        <p:nvSpPr>
+          <p:cNvPr id="73" name="Shape 8">
+            <a:extLst>
+              <a:ext uri="{FF2B5EF4-FFF2-40B4-BE49-F238E27FC236}">
+                <a16:creationId xmlns:a16="http://schemas.microsoft.com/office/drawing/2014/main" id="{06F781D4-79A9-753E-9489-F17F09F4A1F9}"/>
+              </a:ext>
+            </a:extLst>
+          </p:cNvPr>
+          <p:cNvSpPr/>
+          <p:nvPr/>
+        </p:nvSpPr>
+        <p:spPr>
+          <a:xfrm>
+            <a:off x="251952" y="5244790"/>
+            <a:ext cx="88714" cy="1534271"/>
+          </a:xfrm>
+          <a:prstGeom prst="roundRect">
+            <a:avLst>
+              <a:gd name="adj" fmla="val 85050"/>
+            </a:avLst>
+          </a:prstGeom>
+          <a:solidFill>
+            <a:srgbClr val="835E54"/>
+          </a:solidFill>
+          <a:ln/>
+        </p:spPr>
+        <p:txBody>
+          <a:bodyPr/>
+          <a:lstStyle/>
+          <a:p>
+            <a:endParaRPr lang="ru-RU">
               <a:latin typeface="Open Sans" panose="020B0606030504020204" pitchFamily="34" charset="0"/>
               <a:ea typeface="Open Sans" panose="020B0606030504020204" pitchFamily="34" charset="0"/>
               <a:cs typeface="Open Sans" panose="020B0606030504020204" pitchFamily="34" charset="0"/>

--- a/отчет.pptx
+++ b/отчет.pptx
@@ -201,7 +201,7 @@
           <a:p>
             <a:fld id="{CE76225F-2D67-43C4-B54C-06F9FE22719D}" type="datetimeFigureOut">
               <a:rPr lang="ru-RU" smtClean="0"/>
-              <a:t>04.04.2026</a:t>
+              <a:t>05.04.2026</a:t>
             </a:fld>
             <a:endParaRPr lang="ru-RU"/>
           </a:p>
@@ -875,7 +875,7 @@
           <a:p>
             <a:fld id="{E42F00C7-285E-4A74-B7B8-87397FB8E33B}" type="datetimeFigureOut">
               <a:rPr lang="ru-RU" smtClean="0"/>
-              <a:t>04.04.2026</a:t>
+              <a:t>05.04.2026</a:t>
             </a:fld>
             <a:endParaRPr lang="ru-RU"/>
           </a:p>
@@ -1045,7 +1045,7 @@
           <a:p>
             <a:fld id="{E42F00C7-285E-4A74-B7B8-87397FB8E33B}" type="datetimeFigureOut">
               <a:rPr lang="ru-RU" smtClean="0"/>
-              <a:t>04.04.2026</a:t>
+              <a:t>05.04.2026</a:t>
             </a:fld>
             <a:endParaRPr lang="ru-RU"/>
           </a:p>
@@ -1225,7 +1225,7 @@
           <a:p>
             <a:fld id="{E42F00C7-285E-4A74-B7B8-87397FB8E33B}" type="datetimeFigureOut">
               <a:rPr lang="ru-RU" smtClean="0"/>
-              <a:t>04.04.2026</a:t>
+              <a:t>05.04.2026</a:t>
             </a:fld>
             <a:endParaRPr lang="ru-RU"/>
           </a:p>
@@ -1505,7 +1505,7 @@
           <a:p>
             <a:fld id="{E42F00C7-285E-4A74-B7B8-87397FB8E33B}" type="datetimeFigureOut">
               <a:rPr lang="ru-RU" smtClean="0"/>
-              <a:t>04.04.2026</a:t>
+              <a:t>05.04.2026</a:t>
             </a:fld>
             <a:endParaRPr lang="ru-RU"/>
           </a:p>
@@ -1751,7 +1751,7 @@
           <a:p>
             <a:fld id="{E42F00C7-285E-4A74-B7B8-87397FB8E33B}" type="datetimeFigureOut">
               <a:rPr lang="ru-RU" smtClean="0"/>
-              <a:t>04.04.2026</a:t>
+              <a:t>05.04.2026</a:t>
             </a:fld>
             <a:endParaRPr lang="ru-RU"/>
           </a:p>
@@ -1983,7 +1983,7 @@
           <a:p>
             <a:fld id="{E42F00C7-285E-4A74-B7B8-87397FB8E33B}" type="datetimeFigureOut">
               <a:rPr lang="ru-RU" smtClean="0"/>
-              <a:t>04.04.2026</a:t>
+              <a:t>05.04.2026</a:t>
             </a:fld>
             <a:endParaRPr lang="ru-RU"/>
           </a:p>
@@ -2350,7 +2350,7 @@
           <a:p>
             <a:fld id="{E42F00C7-285E-4A74-B7B8-87397FB8E33B}" type="datetimeFigureOut">
               <a:rPr lang="ru-RU" smtClean="0"/>
-              <a:t>04.04.2026</a:t>
+              <a:t>05.04.2026</a:t>
             </a:fld>
             <a:endParaRPr lang="ru-RU"/>
           </a:p>
@@ -2468,7 +2468,7 @@
           <a:p>
             <a:fld id="{E42F00C7-285E-4A74-B7B8-87397FB8E33B}" type="datetimeFigureOut">
               <a:rPr lang="ru-RU" smtClean="0"/>
-              <a:t>04.04.2026</a:t>
+              <a:t>05.04.2026</a:t>
             </a:fld>
             <a:endParaRPr lang="ru-RU"/>
           </a:p>
@@ -2563,7 +2563,7 @@
           <a:p>
             <a:fld id="{E42F00C7-285E-4A74-B7B8-87397FB8E33B}" type="datetimeFigureOut">
               <a:rPr lang="ru-RU" smtClean="0"/>
-              <a:t>04.04.2026</a:t>
+              <a:t>05.04.2026</a:t>
             </a:fld>
             <a:endParaRPr lang="ru-RU"/>
           </a:p>
@@ -2840,7 +2840,7 @@
           <a:p>
             <a:fld id="{E42F00C7-285E-4A74-B7B8-87397FB8E33B}" type="datetimeFigureOut">
               <a:rPr lang="ru-RU" smtClean="0"/>
-              <a:t>04.04.2026</a:t>
+              <a:t>05.04.2026</a:t>
             </a:fld>
             <a:endParaRPr lang="ru-RU"/>
           </a:p>
@@ -3097,7 +3097,7 @@
           <a:p>
             <a:fld id="{E42F00C7-285E-4A74-B7B8-87397FB8E33B}" type="datetimeFigureOut">
               <a:rPr lang="ru-RU" smtClean="0"/>
-              <a:t>04.04.2026</a:t>
+              <a:t>05.04.2026</a:t>
             </a:fld>
             <a:endParaRPr lang="ru-RU"/>
           </a:p>
@@ -3310,7 +3310,7 @@
           <a:p>
             <a:fld id="{E42F00C7-285E-4A74-B7B8-87397FB8E33B}" type="datetimeFigureOut">
               <a:rPr lang="ru-RU" smtClean="0"/>
-              <a:t>04.04.2026</a:t>
+              <a:t>05.04.2026</a:t>
             </a:fld>
             <a:endParaRPr lang="ru-RU"/>
           </a:p>
@@ -3971,9 +3971,9 @@
                 <a:solidFill>
                   <a:srgbClr val="443728"/>
                 </a:solidFill>
-                <a:latin typeface="Open Sans" panose="020B0606030504020204" pitchFamily="34" charset="0"/>
-                <a:ea typeface="Open Sans" panose="020B0606030504020204" pitchFamily="34" charset="0"/>
-                <a:cs typeface="Open Sans" panose="020B0606030504020204" pitchFamily="34" charset="0"/>
+                <a:latin typeface="Open Sans" pitchFamily="34" charset="0"/>
+                <a:ea typeface="Open Sans" pitchFamily="34" charset="-122"/>
+                <a:cs typeface="Open Sans" pitchFamily="34" charset="-120"/>
               </a:rPr>
               <a:t>Кадастровый</a:t>
             </a:r>
@@ -3982,9 +3982,9 @@
                 <a:solidFill>
                   <a:srgbClr val="443728"/>
                 </a:solidFill>
-                <a:latin typeface="Open Sans" panose="020B0606030504020204" pitchFamily="34" charset="0"/>
-                <a:ea typeface="Open Sans" panose="020B0606030504020204" pitchFamily="34" charset="0"/>
-                <a:cs typeface="Open Sans" panose="020B0606030504020204" pitchFamily="34" charset="0"/>
+                <a:latin typeface="Open Sans" pitchFamily="34" charset="0"/>
+                <a:ea typeface="Open Sans" pitchFamily="34" charset="-122"/>
+                <a:cs typeface="Open Sans" pitchFamily="34" charset="-120"/>
               </a:rPr>
               <a:t> </a:t>
             </a:r>
@@ -3993,9 +3993,9 @@
                 <a:solidFill>
                   <a:srgbClr val="443728"/>
                 </a:solidFill>
-                <a:latin typeface="Open Sans" panose="020B0606030504020204" pitchFamily="34" charset="0"/>
-                <a:ea typeface="Open Sans" panose="020B0606030504020204" pitchFamily="34" charset="0"/>
-                <a:cs typeface="Open Sans" panose="020B0606030504020204" pitchFamily="34" charset="0"/>
+                <a:latin typeface="Open Sans" pitchFamily="34" charset="0"/>
+                <a:ea typeface="Open Sans" pitchFamily="34" charset="-122"/>
+                <a:cs typeface="Open Sans" pitchFamily="34" charset="-120"/>
               </a:rPr>
               <a:t>номер</a:t>
             </a:r>
@@ -4004,9 +4004,9 @@
                 <a:solidFill>
                   <a:srgbClr val="443728"/>
                 </a:solidFill>
-                <a:latin typeface="Open Sans" panose="020B0606030504020204" pitchFamily="34" charset="0"/>
-                <a:ea typeface="Open Sans" panose="020B0606030504020204" pitchFamily="34" charset="0"/>
-                <a:cs typeface="Open Sans" panose="020B0606030504020204" pitchFamily="34" charset="0"/>
+                <a:latin typeface="Open Sans" pitchFamily="34" charset="0"/>
+                <a:ea typeface="Open Sans" pitchFamily="34" charset="-122"/>
+                <a:cs typeface="Open Sans" pitchFamily="34" charset="-120"/>
               </a:rPr>
               <a:t>: </a:t>
             </a:r>
@@ -4015,20 +4015,31 @@
                 <a:solidFill>
                   <a:srgbClr val="443728"/>
                 </a:solidFill>
-                <a:latin typeface="Open Sans" panose="020B0606030504020204" pitchFamily="34" charset="0"/>
-                <a:ea typeface="Open Sans" panose="020B0606030504020204" pitchFamily="34" charset="0"/>
-                <a:cs typeface="Open Sans" panose="020B0606030504020204" pitchFamily="34" charset="0"/>
-              </a:rPr>
-              <a:t>50:21:0040211:1234</a:t>
+                <a:latin typeface="Open Sans" pitchFamily="34" charset="0"/>
+                <a:ea typeface="Open Sans" pitchFamily="34" charset="-122"/>
+                <a:cs typeface="Open Sans" pitchFamily="34" charset="-120"/>
+              </a:rPr>
+              <a:t>50:</a:t>
+            </a:r>
+            <a:r>
+              <a:rPr lang="ru-RU" sz="1400" b="1" dirty="0">
+                <a:solidFill>
+                  <a:srgbClr val="443728"/>
+                </a:solidFill>
+                <a:latin typeface="Open Sans" pitchFamily="34" charset="0"/>
+                <a:ea typeface="Open Sans" pitchFamily="34" charset="-122"/>
+                <a:cs typeface="Open Sans" pitchFamily="34" charset="-120"/>
+              </a:rPr>
+              <a:t>03:0020136:54</a:t>
             </a:r>
             <a:r>
               <a:rPr lang="en-US" sz="1400" dirty="0">
                 <a:solidFill>
                   <a:srgbClr val="443728"/>
                 </a:solidFill>
-                <a:latin typeface="Open Sans" panose="020B0606030504020204" pitchFamily="34" charset="0"/>
-                <a:ea typeface="Open Sans" panose="020B0606030504020204" pitchFamily="34" charset="0"/>
-                <a:cs typeface="Open Sans" panose="020B0606030504020204" pitchFamily="34" charset="0"/>
+                <a:latin typeface="Open Sans" pitchFamily="34" charset="0"/>
+                <a:ea typeface="Open Sans" pitchFamily="34" charset="-122"/>
+                <a:cs typeface="Open Sans" pitchFamily="34" charset="-120"/>
               </a:rPr>
               <a:t> </a:t>
             </a:r>
@@ -4099,6 +4110,72 @@
               <a:t>., </a:t>
             </a:r>
             <a:r>
+              <a:rPr lang="ru-RU" sz="1400" dirty="0">
+                <a:solidFill>
+                  <a:srgbClr val="443728"/>
+                </a:solidFill>
+                <a:latin typeface="Open Sans" panose="020B0606030504020204" pitchFamily="34" charset="0"/>
+                <a:ea typeface="Open Sans" panose="020B0606030504020204" pitchFamily="34" charset="0"/>
+                <a:cs typeface="Open Sans" panose="020B0606030504020204" pitchFamily="34" charset="0"/>
+              </a:rPr>
+              <a:t>Клинский</a:t>
+            </a:r>
+            <a:r>
+              <a:rPr lang="en-US" sz="1400" dirty="0">
+                <a:solidFill>
+                  <a:srgbClr val="443728"/>
+                </a:solidFill>
+                <a:latin typeface="Open Sans" panose="020B0606030504020204" pitchFamily="34" charset="0"/>
+                <a:ea typeface="Open Sans" panose="020B0606030504020204" pitchFamily="34" charset="0"/>
+                <a:cs typeface="Open Sans" panose="020B0606030504020204" pitchFamily="34" charset="0"/>
+              </a:rPr>
+              <a:t> р-н, </a:t>
+            </a:r>
+            <a:r>
+              <a:rPr lang="ru-RU" sz="1400" dirty="0">
+                <a:solidFill>
+                  <a:srgbClr val="443728"/>
+                </a:solidFill>
+                <a:latin typeface="Open Sans" panose="020B0606030504020204" pitchFamily="34" charset="0"/>
+                <a:ea typeface="Open Sans" panose="020B0606030504020204" pitchFamily="34" charset="0"/>
+                <a:cs typeface="Open Sans" panose="020B0606030504020204" pitchFamily="34" charset="0"/>
+              </a:rPr>
+              <a:t>д</a:t>
+            </a:r>
+            <a:r>
+              <a:rPr lang="en-US" sz="1400" dirty="0">
+                <a:solidFill>
+                  <a:srgbClr val="443728"/>
+                </a:solidFill>
+                <a:latin typeface="Open Sans" panose="020B0606030504020204" pitchFamily="34" charset="0"/>
+                <a:ea typeface="Open Sans" panose="020B0606030504020204" pitchFamily="34" charset="0"/>
+                <a:cs typeface="Open Sans" panose="020B0606030504020204" pitchFamily="34" charset="0"/>
+              </a:rPr>
+              <a:t>. </a:t>
+            </a:r>
+            <a:r>
+              <a:rPr lang="ru-RU" sz="1400" dirty="0">
+                <a:solidFill>
+                  <a:srgbClr val="443728"/>
+                </a:solidFill>
+                <a:latin typeface="Open Sans" panose="020B0606030504020204" pitchFamily="34" charset="0"/>
+                <a:ea typeface="Open Sans" panose="020B0606030504020204" pitchFamily="34" charset="0"/>
+                <a:cs typeface="Open Sans" panose="020B0606030504020204" pitchFamily="34" charset="0"/>
+              </a:rPr>
+              <a:t>Ямуга</a:t>
+            </a:r>
+            <a:r>
+              <a:rPr lang="en-US" sz="1400" dirty="0">
+                <a:solidFill>
+                  <a:srgbClr val="443728"/>
+                </a:solidFill>
+                <a:latin typeface="Open Sans" panose="020B0606030504020204" pitchFamily="34" charset="0"/>
+                <a:ea typeface="Open Sans" panose="020B0606030504020204" pitchFamily="34" charset="0"/>
+                <a:cs typeface="Open Sans" panose="020B0606030504020204" pitchFamily="34" charset="0"/>
+              </a:rPr>
+              <a:t>, </a:t>
+            </a:r>
+            <a:r>
               <a:rPr lang="en-US" sz="1400" dirty="0" err="1">
                 <a:solidFill>
                   <a:srgbClr val="443728"/>
@@ -4107,7 +4184,7 @@
                 <a:ea typeface="Open Sans" panose="020B0606030504020204" pitchFamily="34" charset="0"/>
                 <a:cs typeface="Open Sans" panose="020B0606030504020204" pitchFamily="34" charset="0"/>
               </a:rPr>
-              <a:t>Истринский</a:t>
+              <a:t>участок</a:t>
             </a:r>
             <a:r>
               <a:rPr lang="en-US" sz="1400" dirty="0">
@@ -4118,7 +4195,29 @@
                 <a:ea typeface="Open Sans" panose="020B0606030504020204" pitchFamily="34" charset="0"/>
                 <a:cs typeface="Open Sans" panose="020B0606030504020204" pitchFamily="34" charset="0"/>
               </a:rPr>
-              <a:t> р-н, с. </a:t>
+              <a:t> № </a:t>
+            </a:r>
+            <a:r>
+              <a:rPr lang="ru-RU" sz="1400" dirty="0">
+                <a:solidFill>
+                  <a:srgbClr val="443728"/>
+                </a:solidFill>
+                <a:latin typeface="Open Sans" panose="020B0606030504020204" pitchFamily="34" charset="0"/>
+                <a:ea typeface="Open Sans" panose="020B0606030504020204" pitchFamily="34" charset="0"/>
+                <a:cs typeface="Open Sans" panose="020B0606030504020204" pitchFamily="34" charset="0"/>
+              </a:rPr>
+              <a:t>54</a:t>
+            </a:r>
+            <a:r>
+              <a:rPr lang="en-US" sz="1400" dirty="0">
+                <a:solidFill>
+                  <a:srgbClr val="443728"/>
+                </a:solidFill>
+                <a:latin typeface="Open Sans" panose="020B0606030504020204" pitchFamily="34" charset="0"/>
+                <a:ea typeface="Open Sans" panose="020B0606030504020204" pitchFamily="34" charset="0"/>
+                <a:cs typeface="Open Sans" panose="020B0606030504020204" pitchFamily="34" charset="0"/>
+              </a:rPr>
+              <a:t> </a:t>
             </a:r>
             <a:r>
               <a:rPr lang="en-US" sz="1400" dirty="0" err="1">
@@ -4129,7 +4228,7 @@
                 <a:ea typeface="Open Sans" panose="020B0606030504020204" pitchFamily="34" charset="0"/>
                 <a:cs typeface="Open Sans" panose="020B0606030504020204" pitchFamily="34" charset="0"/>
               </a:rPr>
-              <a:t>Новораково</a:t>
+              <a:t>Площадь</a:t>
             </a:r>
             <a:r>
               <a:rPr lang="en-US" sz="1400" dirty="0">
@@ -4140,53 +4239,20 @@
                 <a:ea typeface="Open Sans" panose="020B0606030504020204" pitchFamily="34" charset="0"/>
                 <a:cs typeface="Open Sans" panose="020B0606030504020204" pitchFamily="34" charset="0"/>
               </a:rPr>
-              <a:t>, </a:t>
-            </a:r>
-            <a:r>
-              <a:rPr lang="en-US" sz="1400" dirty="0" err="1">
-                <a:solidFill>
-                  <a:srgbClr val="443728"/>
-                </a:solidFill>
-                <a:latin typeface="Open Sans" panose="020B0606030504020204" pitchFamily="34" charset="0"/>
-                <a:ea typeface="Open Sans" panose="020B0606030504020204" pitchFamily="34" charset="0"/>
-                <a:cs typeface="Open Sans" panose="020B0606030504020204" pitchFamily="34" charset="0"/>
-              </a:rPr>
-              <a:t>участок</a:t>
-            </a:r>
-            <a:r>
-              <a:rPr lang="en-US" sz="1400" dirty="0">
-                <a:solidFill>
-                  <a:srgbClr val="443728"/>
-                </a:solidFill>
-                <a:latin typeface="Open Sans" panose="020B0606030504020204" pitchFamily="34" charset="0"/>
-                <a:ea typeface="Open Sans" panose="020B0606030504020204" pitchFamily="34" charset="0"/>
-                <a:cs typeface="Open Sans" panose="020B0606030504020204" pitchFamily="34" charset="0"/>
-              </a:rPr>
-              <a:t> № 47 </a:t>
-            </a:r>
-            <a:r>
-              <a:rPr lang="en-US" sz="1400" dirty="0" err="1">
-                <a:solidFill>
-                  <a:srgbClr val="443728"/>
-                </a:solidFill>
-                <a:latin typeface="Open Sans" panose="020B0606030504020204" pitchFamily="34" charset="0"/>
-                <a:ea typeface="Open Sans" panose="020B0606030504020204" pitchFamily="34" charset="0"/>
-                <a:cs typeface="Open Sans" panose="020B0606030504020204" pitchFamily="34" charset="0"/>
-              </a:rPr>
-              <a:t>Площадь</a:t>
-            </a:r>
-            <a:r>
-              <a:rPr lang="en-US" sz="1400" dirty="0">
-                <a:solidFill>
-                  <a:srgbClr val="443728"/>
-                </a:solidFill>
-                <a:latin typeface="Open Sans" panose="020B0606030504020204" pitchFamily="34" charset="0"/>
-                <a:ea typeface="Open Sans" panose="020B0606030504020204" pitchFamily="34" charset="0"/>
-                <a:cs typeface="Open Sans" panose="020B0606030504020204" pitchFamily="34" charset="0"/>
-              </a:rPr>
               <a:t>: </a:t>
             </a:r>
             <a:r>
+              <a:rPr lang="ru-RU" sz="1400" b="1" dirty="0">
+                <a:solidFill>
+                  <a:srgbClr val="443728"/>
+                </a:solidFill>
+                <a:latin typeface="Open Sans" panose="020B0606030504020204" pitchFamily="34" charset="0"/>
+                <a:ea typeface="Open Sans" panose="020B0606030504020204" pitchFamily="34" charset="0"/>
+                <a:cs typeface="Open Sans" panose="020B0606030504020204" pitchFamily="34" charset="0"/>
+              </a:rPr>
+              <a:t>8</a:t>
+            </a:r>
+            <a:r>
               <a:rPr lang="en-US" sz="1400" b="1" dirty="0">
                 <a:solidFill>
                   <a:srgbClr val="443728"/>
@@ -4195,7 +4261,7 @@
                 <a:ea typeface="Open Sans" panose="020B0606030504020204" pitchFamily="34" charset="0"/>
                 <a:cs typeface="Open Sans" panose="020B0606030504020204" pitchFamily="34" charset="0"/>
               </a:rPr>
-              <a:t>12 </a:t>
+              <a:t> </a:t>
             </a:r>
             <a:r>
               <a:rPr lang="en-US" sz="1400" b="1" dirty="0" err="1">
@@ -4209,16 +4275,31 @@
               <a:t>соток</a:t>
             </a:r>
             <a:r>
-              <a:rPr lang="en-US" sz="1400" dirty="0">
-                <a:solidFill>
-                  <a:srgbClr val="443728"/>
-                </a:solidFill>
-                <a:latin typeface="Open Sans" panose="020B0606030504020204" pitchFamily="34" charset="0"/>
-                <a:ea typeface="Open Sans" panose="020B0606030504020204" pitchFamily="34" charset="0"/>
-                <a:cs typeface="Open Sans" panose="020B0606030504020204" pitchFamily="34" charset="0"/>
-              </a:rPr>
-              <a:t> · </a:t>
-            </a:r>
+              <a:rPr lang="ru-RU" sz="1400" b="1" dirty="0">
+                <a:solidFill>
+                  <a:srgbClr val="443728"/>
+                </a:solidFill>
+                <a:latin typeface="Open Sans" panose="020B0606030504020204" pitchFamily="34" charset="0"/>
+                <a:ea typeface="Open Sans" panose="020B0606030504020204" pitchFamily="34" charset="0"/>
+                <a:cs typeface="Open Sans" panose="020B0606030504020204" pitchFamily="34" charset="0"/>
+              </a:rPr>
+              <a:t>,</a:t>
+            </a:r>
+            <a:endParaRPr lang="ru-RU" sz="1400" dirty="0">
+              <a:solidFill>
+                <a:srgbClr val="443728"/>
+              </a:solidFill>
+              <a:latin typeface="Open Sans" panose="020B0606030504020204" pitchFamily="34" charset="0"/>
+              <a:ea typeface="Open Sans" panose="020B0606030504020204" pitchFamily="34" charset="0"/>
+              <a:cs typeface="Open Sans" panose="020B0606030504020204" pitchFamily="34" charset="0"/>
+            </a:endParaRPr>
+          </a:p>
+          <a:p>
+            <a:pPr>
+              <a:lnSpc>
+                <a:spcPts val="1700"/>
+              </a:lnSpc>
+            </a:pPr>
             <a:r>
               <a:rPr lang="en-US" sz="1400" dirty="0" err="1">
                 <a:solidFill>
@@ -5338,6 +5419,550 @@
           </a:p>
         </p:txBody>
       </p:sp>
+      <p:pic>
+        <p:nvPicPr>
+          <p:cNvPr id="5" name="Рисунок 4">
+            <a:extLst>
+              <a:ext uri="{FF2B5EF4-FFF2-40B4-BE49-F238E27FC236}">
+                <a16:creationId xmlns:a16="http://schemas.microsoft.com/office/drawing/2014/main" id="{42F8C9EB-C0BB-68B2-EE92-5CD4A79821C3}"/>
+              </a:ext>
+            </a:extLst>
+          </p:cNvPr>
+          <p:cNvPicPr>
+            <a:picLocks noChangeAspect="1"/>
+          </p:cNvPicPr>
+          <p:nvPr/>
+        </p:nvPicPr>
+        <p:blipFill>
+          <a:blip r:embed="rId3">
+            <a:extLst>
+              <a:ext uri="{28A0092B-C50C-407E-A947-70E740481C1C}">
+                <a14:useLocalDpi xmlns:a14="http://schemas.microsoft.com/office/drawing/2010/main" val="0"/>
+              </a:ext>
+            </a:extLst>
+          </a:blip>
+          <a:stretch>
+            <a:fillRect/>
+          </a:stretch>
+        </p:blipFill>
+        <p:spPr>
+          <a:xfrm>
+            <a:off x="-55564" y="882950"/>
+            <a:ext cx="7670801" cy="6504289"/>
+          </a:xfrm>
+          <a:prstGeom prst="rect">
+            <a:avLst/>
+          </a:prstGeom>
+        </p:spPr>
+      </p:pic>
+      <p:pic>
+        <p:nvPicPr>
+          <p:cNvPr id="3" name="Рисунок 2">
+            <a:extLst>
+              <a:ext uri="{FF2B5EF4-FFF2-40B4-BE49-F238E27FC236}">
+                <a16:creationId xmlns:a16="http://schemas.microsoft.com/office/drawing/2014/main" id="{0B6108DB-5D17-6C21-0948-1514420A9BEB}"/>
+              </a:ext>
+            </a:extLst>
+          </p:cNvPr>
+          <p:cNvPicPr>
+            <a:picLocks noChangeAspect="1"/>
+          </p:cNvPicPr>
+          <p:nvPr/>
+        </p:nvPicPr>
+        <p:blipFill>
+          <a:blip r:embed="rId4"/>
+          <a:stretch>
+            <a:fillRect/>
+          </a:stretch>
+        </p:blipFill>
+        <p:spPr>
+          <a:xfrm>
+            <a:off x="236782" y="5039179"/>
+            <a:ext cx="3091224" cy="1868640"/>
+          </a:xfrm>
+          <a:prstGeom prst="rect">
+            <a:avLst/>
+          </a:prstGeom>
+        </p:spPr>
+      </p:pic>
+      <p:sp>
+        <p:nvSpPr>
+          <p:cNvPr id="6" name="Text 0">
+            <a:extLst>
+              <a:ext uri="{FF2B5EF4-FFF2-40B4-BE49-F238E27FC236}">
+                <a16:creationId xmlns:a16="http://schemas.microsoft.com/office/drawing/2014/main" id="{476BCE71-030A-8A92-8AD7-AD7AC2AF9B1B}"/>
+              </a:ext>
+            </a:extLst>
+          </p:cNvPr>
+          <p:cNvSpPr/>
+          <p:nvPr/>
+        </p:nvSpPr>
+        <p:spPr>
+          <a:xfrm>
+            <a:off x="461486" y="250951"/>
+            <a:ext cx="5438180" cy="419457"/>
+          </a:xfrm>
+          <a:prstGeom prst="rect">
+            <a:avLst/>
+          </a:prstGeom>
+          <a:noFill/>
+          <a:ln/>
+        </p:spPr>
+        <p:txBody>
+          <a:bodyPr wrap="none" lIns="0" tIns="0" rIns="0" bIns="0" rtlCol="0" anchor="t"/>
+          <a:lstStyle/>
+          <a:p>
+            <a:pPr>
+              <a:lnSpc>
+                <a:spcPts val="3300"/>
+              </a:lnSpc>
+            </a:pPr>
+            <a:r>
+              <a:rPr lang="en-US" sz="2600" b="1" dirty="0">
+                <a:solidFill>
+                  <a:srgbClr val="443728"/>
+                </a:solidFill>
+                <a:latin typeface="Crimson Pro Bold" pitchFamily="34" charset="0"/>
+                <a:ea typeface="Crimson Pro Bold" pitchFamily="34" charset="-122"/>
+                <a:cs typeface="Crimson Pro Bold" pitchFamily="34" charset="-120"/>
+              </a:rPr>
+              <a:t>Карта участка с зонами рисков</a:t>
+            </a:r>
+            <a:endParaRPr lang="en-US" sz="2600" dirty="0"/>
+          </a:p>
+        </p:txBody>
+      </p:sp>
+      <p:sp>
+        <p:nvSpPr>
+          <p:cNvPr id="7" name="Text 1">
+            <a:extLst>
+              <a:ext uri="{FF2B5EF4-FFF2-40B4-BE49-F238E27FC236}">
+                <a16:creationId xmlns:a16="http://schemas.microsoft.com/office/drawing/2014/main" id="{F3D9CF5B-3043-F372-9E3A-16743F5320BE}"/>
+              </a:ext>
+            </a:extLst>
+          </p:cNvPr>
+          <p:cNvSpPr/>
+          <p:nvPr/>
+        </p:nvSpPr>
+        <p:spPr>
+          <a:xfrm>
+            <a:off x="236782" y="7709717"/>
+            <a:ext cx="6923584" cy="598070"/>
+          </a:xfrm>
+          <a:prstGeom prst="rect">
+            <a:avLst/>
+          </a:prstGeom>
+          <a:noFill/>
+          <a:ln/>
+        </p:spPr>
+        <p:txBody>
+          <a:bodyPr wrap="square" lIns="0" tIns="0" rIns="0" bIns="0" rtlCol="0" anchor="t"/>
+          <a:lstStyle/>
+          <a:p>
+            <a:pPr>
+              <a:lnSpc>
+                <a:spcPts val="1700"/>
+              </a:lnSpc>
+            </a:pPr>
+            <a:r>
+              <a:rPr lang="en-US" sz="1400" dirty="0" err="1">
+                <a:solidFill>
+                  <a:srgbClr val="443728"/>
+                </a:solidFill>
+                <a:latin typeface="Open Sans" pitchFamily="34" charset="0"/>
+                <a:ea typeface="Open Sans" pitchFamily="34" charset="-122"/>
+                <a:cs typeface="Open Sans" pitchFamily="34" charset="-120"/>
+              </a:rPr>
+              <a:t>На</a:t>
+            </a:r>
+            <a:r>
+              <a:rPr lang="en-US" sz="1400" dirty="0">
+                <a:solidFill>
+                  <a:srgbClr val="443728"/>
+                </a:solidFill>
+                <a:latin typeface="Open Sans" pitchFamily="34" charset="0"/>
+                <a:ea typeface="Open Sans" pitchFamily="34" charset="-122"/>
+                <a:cs typeface="Open Sans" pitchFamily="34" charset="-120"/>
+              </a:rPr>
+              <a:t> </a:t>
+            </a:r>
+            <a:r>
+              <a:rPr lang="en-US" sz="1400" dirty="0" err="1">
+                <a:solidFill>
+                  <a:srgbClr val="443728"/>
+                </a:solidFill>
+                <a:latin typeface="Open Sans" pitchFamily="34" charset="0"/>
+                <a:ea typeface="Open Sans" pitchFamily="34" charset="-122"/>
+                <a:cs typeface="Open Sans" pitchFamily="34" charset="-120"/>
+              </a:rPr>
+              <a:t>карте</a:t>
+            </a:r>
+            <a:r>
+              <a:rPr lang="ru-RU" sz="1400" dirty="0">
+                <a:solidFill>
+                  <a:srgbClr val="443728"/>
+                </a:solidFill>
+                <a:latin typeface="Open Sans" pitchFamily="34" charset="0"/>
+                <a:ea typeface="Open Sans" pitchFamily="34" charset="-122"/>
+                <a:cs typeface="Open Sans" pitchFamily="34" charset="-120"/>
+              </a:rPr>
+              <a:t> подсвечены ключевые моменты, </a:t>
+            </a:r>
+            <a:r>
+              <a:rPr lang="en-US" sz="1400" dirty="0" err="1">
+                <a:solidFill>
+                  <a:srgbClr val="443728"/>
+                </a:solidFill>
+                <a:latin typeface="Open Sans" pitchFamily="34" charset="0"/>
+                <a:ea typeface="Open Sans" pitchFamily="34" charset="-122"/>
+                <a:cs typeface="Open Sans" pitchFamily="34" charset="-120"/>
+              </a:rPr>
+              <a:t>влияющие</a:t>
+            </a:r>
+            <a:r>
+              <a:rPr lang="en-US" sz="1400" dirty="0">
+                <a:solidFill>
+                  <a:srgbClr val="443728"/>
+                </a:solidFill>
+                <a:latin typeface="Open Sans" pitchFamily="34" charset="0"/>
+                <a:ea typeface="Open Sans" pitchFamily="34" charset="-122"/>
+                <a:cs typeface="Open Sans" pitchFamily="34" charset="-120"/>
+              </a:rPr>
+              <a:t> на возможность строительства и </a:t>
+            </a:r>
+            <a:r>
+              <a:rPr lang="en-US" sz="1400" dirty="0" err="1">
+                <a:solidFill>
+                  <a:srgbClr val="443728"/>
+                </a:solidFill>
+                <a:latin typeface="Open Sans" pitchFamily="34" charset="0"/>
+                <a:ea typeface="Open Sans" pitchFamily="34" charset="-122"/>
+                <a:cs typeface="Open Sans" pitchFamily="34" charset="-120"/>
+              </a:rPr>
+              <a:t>стоимость</a:t>
+            </a:r>
+            <a:r>
+              <a:rPr lang="en-US" sz="1400" dirty="0">
+                <a:solidFill>
+                  <a:srgbClr val="443728"/>
+                </a:solidFill>
+                <a:latin typeface="Open Sans" pitchFamily="34" charset="0"/>
+                <a:ea typeface="Open Sans" pitchFamily="34" charset="-122"/>
+                <a:cs typeface="Open Sans" pitchFamily="34" charset="-120"/>
+              </a:rPr>
+              <a:t> </a:t>
+            </a:r>
+            <a:r>
+              <a:rPr lang="ru-RU" sz="1400" dirty="0">
+                <a:solidFill>
+                  <a:srgbClr val="443728"/>
+                </a:solidFill>
+                <a:latin typeface="Open Sans" pitchFamily="34" charset="0"/>
+                <a:ea typeface="Open Sans" pitchFamily="34" charset="-122"/>
+                <a:cs typeface="Open Sans" pitchFamily="34" charset="-120"/>
+              </a:rPr>
+              <a:t>выбранного участка</a:t>
+            </a:r>
+            <a:endParaRPr lang="en-US" sz="1400" dirty="0"/>
+          </a:p>
+        </p:txBody>
+      </p:sp>
+      <p:sp>
+        <p:nvSpPr>
+          <p:cNvPr id="13" name="Text 3">
+            <a:extLst>
+              <a:ext uri="{FF2B5EF4-FFF2-40B4-BE49-F238E27FC236}">
+                <a16:creationId xmlns:a16="http://schemas.microsoft.com/office/drawing/2014/main" id="{831E591B-0B86-E713-972E-2CCD6F4535A8}"/>
+              </a:ext>
+            </a:extLst>
+          </p:cNvPr>
+          <p:cNvSpPr/>
+          <p:nvPr/>
+        </p:nvSpPr>
+        <p:spPr>
+          <a:xfrm>
+            <a:off x="236782" y="8768061"/>
+            <a:ext cx="2622085" cy="214234"/>
+          </a:xfrm>
+          <a:prstGeom prst="rect">
+            <a:avLst/>
+          </a:prstGeom>
+          <a:noFill/>
+          <a:ln/>
+        </p:spPr>
+        <p:txBody>
+          <a:bodyPr wrap="none" lIns="0" tIns="0" rIns="0" bIns="0" rtlCol="0" anchor="t"/>
+          <a:lstStyle/>
+          <a:p>
+            <a:pPr>
+              <a:lnSpc>
+                <a:spcPts val="1650"/>
+              </a:lnSpc>
+            </a:pPr>
+            <a:r>
+              <a:rPr lang="en-US" b="1" dirty="0">
+                <a:solidFill>
+                  <a:srgbClr val="000000"/>
+                </a:solidFill>
+                <a:latin typeface="Open Sans" panose="020B0606030504020204" pitchFamily="34" charset="0"/>
+                <a:ea typeface="Open Sans" panose="020B0606030504020204" pitchFamily="34" charset="0"/>
+                <a:cs typeface="Open Sans" panose="020B0606030504020204" pitchFamily="34" charset="0"/>
+              </a:rPr>
+              <a:t>Ключевые расстояния</a:t>
+            </a:r>
+            <a:endParaRPr lang="en-US" dirty="0">
+              <a:latin typeface="Open Sans" panose="020B0606030504020204" pitchFamily="34" charset="0"/>
+              <a:ea typeface="Open Sans" panose="020B0606030504020204" pitchFamily="34" charset="0"/>
+              <a:cs typeface="Open Sans" panose="020B0606030504020204" pitchFamily="34" charset="0"/>
+            </a:endParaRPr>
+          </a:p>
+        </p:txBody>
+      </p:sp>
+      <p:sp>
+        <p:nvSpPr>
+          <p:cNvPr id="14" name="Text 4">
+            <a:extLst>
+              <a:ext uri="{FF2B5EF4-FFF2-40B4-BE49-F238E27FC236}">
+                <a16:creationId xmlns:a16="http://schemas.microsoft.com/office/drawing/2014/main" id="{A294EB31-8027-CEAC-F94F-7AFB81076C71}"/>
+              </a:ext>
+            </a:extLst>
+          </p:cNvPr>
+          <p:cNvSpPr/>
+          <p:nvPr/>
+        </p:nvSpPr>
+        <p:spPr>
+          <a:xfrm>
+            <a:off x="236782" y="9050833"/>
+            <a:ext cx="2781437" cy="169369"/>
+          </a:xfrm>
+          <a:prstGeom prst="rect">
+            <a:avLst/>
+          </a:prstGeom>
+          <a:noFill/>
+          <a:ln/>
+        </p:spPr>
+        <p:txBody>
+          <a:bodyPr wrap="none" lIns="0" tIns="0" rIns="0" bIns="0" rtlCol="0" anchor="t"/>
+          <a:lstStyle/>
+          <a:p>
+            <a:pPr>
+              <a:lnSpc>
+                <a:spcPts val="1300"/>
+              </a:lnSpc>
+            </a:pPr>
+            <a:r>
+              <a:rPr lang="en-US" sz="1400" dirty="0">
+                <a:solidFill>
+                  <a:srgbClr val="000000"/>
+                </a:solidFill>
+                <a:latin typeface="Open Sans" panose="020B0606030504020204" pitchFamily="34" charset="0"/>
+                <a:ea typeface="Open Sans" panose="020B0606030504020204" pitchFamily="34" charset="0"/>
+                <a:cs typeface="Open Sans" panose="020B0606030504020204" pitchFamily="34" charset="0"/>
+              </a:rPr>
+              <a:t>До </a:t>
+            </a:r>
+            <a:r>
+              <a:rPr lang="en-US" sz="1400" dirty="0" err="1">
+                <a:solidFill>
+                  <a:srgbClr val="000000"/>
+                </a:solidFill>
+                <a:latin typeface="Open Sans" panose="020B0606030504020204" pitchFamily="34" charset="0"/>
+                <a:ea typeface="Open Sans" panose="020B0606030504020204" pitchFamily="34" charset="0"/>
+                <a:cs typeface="Open Sans" panose="020B0606030504020204" pitchFamily="34" charset="0"/>
+              </a:rPr>
+              <a:t>реки</a:t>
+            </a:r>
+            <a:r>
+              <a:rPr lang="en-US" sz="1400" dirty="0">
+                <a:solidFill>
+                  <a:srgbClr val="000000"/>
+                </a:solidFill>
+                <a:latin typeface="Open Sans" panose="020B0606030504020204" pitchFamily="34" charset="0"/>
+                <a:ea typeface="Open Sans" panose="020B0606030504020204" pitchFamily="34" charset="0"/>
+                <a:cs typeface="Open Sans" panose="020B0606030504020204" pitchFamily="34" charset="0"/>
+              </a:rPr>
+              <a:t> </a:t>
+            </a:r>
+            <a:r>
+              <a:rPr lang="ru-RU" sz="1400" dirty="0">
+                <a:solidFill>
+                  <a:srgbClr val="000000"/>
+                </a:solidFill>
+                <a:latin typeface="Open Sans" panose="020B0606030504020204" pitchFamily="34" charset="0"/>
+                <a:ea typeface="Open Sans" panose="020B0606030504020204" pitchFamily="34" charset="0"/>
+                <a:cs typeface="Open Sans" panose="020B0606030504020204" pitchFamily="34" charset="0"/>
+              </a:rPr>
+              <a:t>Ямуга</a:t>
+            </a:r>
+            <a:r>
+              <a:rPr lang="en-US" sz="1400" dirty="0">
+                <a:solidFill>
+                  <a:srgbClr val="000000"/>
+                </a:solidFill>
+                <a:latin typeface="Open Sans" panose="020B0606030504020204" pitchFamily="34" charset="0"/>
+                <a:ea typeface="Open Sans" panose="020B0606030504020204" pitchFamily="34" charset="0"/>
+                <a:cs typeface="Open Sans" panose="020B0606030504020204" pitchFamily="34" charset="0"/>
+              </a:rPr>
+              <a:t> — </a:t>
+            </a:r>
+            <a:r>
+              <a:rPr lang="en-US" sz="1400" b="1" dirty="0">
+                <a:solidFill>
+                  <a:srgbClr val="C00000"/>
+                </a:solidFill>
+                <a:latin typeface="Open Sans" panose="020B0606030504020204" pitchFamily="34" charset="0"/>
+                <a:ea typeface="Open Sans" panose="020B0606030504020204" pitchFamily="34" charset="0"/>
+                <a:cs typeface="Open Sans" panose="020B0606030504020204" pitchFamily="34" charset="0"/>
+              </a:rPr>
+              <a:t>38 </a:t>
+            </a:r>
+            <a:r>
+              <a:rPr lang="en-US" sz="1400" b="1" dirty="0" err="1">
+                <a:solidFill>
+                  <a:srgbClr val="C00000"/>
+                </a:solidFill>
+                <a:latin typeface="Open Sans" panose="020B0606030504020204" pitchFamily="34" charset="0"/>
+                <a:ea typeface="Open Sans" panose="020B0606030504020204" pitchFamily="34" charset="0"/>
+                <a:cs typeface="Open Sans" panose="020B0606030504020204" pitchFamily="34" charset="0"/>
+              </a:rPr>
+              <a:t>метров</a:t>
+            </a:r>
+            <a:r>
+              <a:rPr lang="ru-RU" sz="1400" b="1" dirty="0">
+                <a:solidFill>
+                  <a:srgbClr val="C00000"/>
+                </a:solidFill>
+                <a:latin typeface="Open Sans" panose="020B0606030504020204" pitchFamily="34" charset="0"/>
+                <a:ea typeface="Open Sans" panose="020B0606030504020204" pitchFamily="34" charset="0"/>
+                <a:cs typeface="Open Sans" panose="020B0606030504020204" pitchFamily="34" charset="0"/>
+              </a:rPr>
+              <a:t> </a:t>
+            </a:r>
+            <a:r>
+              <a:rPr lang="ru-RU" sz="1400" i="1" dirty="0">
+                <a:latin typeface="Open Sans" panose="020B0606030504020204" pitchFamily="34" charset="0"/>
+                <a:ea typeface="Open Sans" panose="020B0606030504020204" pitchFamily="34" charset="0"/>
+                <a:cs typeface="Open Sans" panose="020B0606030504020204" pitchFamily="34" charset="0"/>
+              </a:rPr>
+              <a:t>(50 м водоохранная зона)</a:t>
+            </a:r>
+            <a:endParaRPr lang="en-US" sz="1400" dirty="0">
+              <a:solidFill>
+                <a:srgbClr val="C00000"/>
+              </a:solidFill>
+              <a:latin typeface="Open Sans" panose="020B0606030504020204" pitchFamily="34" charset="0"/>
+              <a:ea typeface="Open Sans" panose="020B0606030504020204" pitchFamily="34" charset="0"/>
+              <a:cs typeface="Open Sans" panose="020B0606030504020204" pitchFamily="34" charset="0"/>
+            </a:endParaRPr>
+          </a:p>
+        </p:txBody>
+      </p:sp>
+      <p:sp>
+        <p:nvSpPr>
+          <p:cNvPr id="15" name="Text 5">
+            <a:extLst>
+              <a:ext uri="{FF2B5EF4-FFF2-40B4-BE49-F238E27FC236}">
+                <a16:creationId xmlns:a16="http://schemas.microsoft.com/office/drawing/2014/main" id="{B17DE712-8160-4C3F-6960-E1082F6DBD83}"/>
+              </a:ext>
+            </a:extLst>
+          </p:cNvPr>
+          <p:cNvSpPr/>
+          <p:nvPr/>
+        </p:nvSpPr>
+        <p:spPr>
+          <a:xfrm>
+            <a:off x="236783" y="9282292"/>
+            <a:ext cx="2781436" cy="214234"/>
+          </a:xfrm>
+          <a:prstGeom prst="rect">
+            <a:avLst/>
+          </a:prstGeom>
+          <a:noFill/>
+          <a:ln/>
+        </p:spPr>
+        <p:txBody>
+          <a:bodyPr wrap="none" lIns="0" tIns="0" rIns="0" bIns="0" rtlCol="0" anchor="t"/>
+          <a:lstStyle/>
+          <a:p>
+            <a:pPr>
+              <a:lnSpc>
+                <a:spcPts val="1300"/>
+              </a:lnSpc>
+            </a:pPr>
+            <a:r>
+              <a:rPr lang="en-US" sz="1400" dirty="0">
+                <a:solidFill>
+                  <a:srgbClr val="000000"/>
+                </a:solidFill>
+                <a:latin typeface="Open Sans" panose="020B0606030504020204" pitchFamily="34" charset="0"/>
+                <a:ea typeface="Open Sans" panose="020B0606030504020204" pitchFamily="34" charset="0"/>
+                <a:cs typeface="Open Sans" panose="020B0606030504020204" pitchFamily="34" charset="0"/>
+              </a:rPr>
+              <a:t>До ЛЭП 110 кВ — </a:t>
+            </a:r>
+            <a:r>
+              <a:rPr lang="en-US" sz="1400" b="1" dirty="0">
+                <a:solidFill>
+                  <a:srgbClr val="C00000"/>
+                </a:solidFill>
+                <a:latin typeface="Open Sans" panose="020B0606030504020204" pitchFamily="34" charset="0"/>
+                <a:ea typeface="Open Sans" panose="020B0606030504020204" pitchFamily="34" charset="0"/>
+                <a:cs typeface="Open Sans" panose="020B0606030504020204" pitchFamily="34" charset="0"/>
+              </a:rPr>
+              <a:t>15 </a:t>
+            </a:r>
+            <a:r>
+              <a:rPr lang="en-US" sz="1400" b="1" dirty="0" err="1">
+                <a:solidFill>
+                  <a:srgbClr val="C00000"/>
+                </a:solidFill>
+                <a:latin typeface="Open Sans" panose="020B0606030504020204" pitchFamily="34" charset="0"/>
+                <a:ea typeface="Open Sans" panose="020B0606030504020204" pitchFamily="34" charset="0"/>
+                <a:cs typeface="Open Sans" panose="020B0606030504020204" pitchFamily="34" charset="0"/>
+              </a:rPr>
+              <a:t>мет</a:t>
+            </a:r>
+            <a:r>
+              <a:rPr lang="ru-RU" sz="1400" b="1" dirty="0">
+                <a:solidFill>
+                  <a:srgbClr val="C00000"/>
+                </a:solidFill>
+                <a:latin typeface="Open Sans" panose="020B0606030504020204" pitchFamily="34" charset="0"/>
+                <a:ea typeface="Open Sans" panose="020B0606030504020204" pitchFamily="34" charset="0"/>
+                <a:cs typeface="Open Sans" panose="020B0606030504020204" pitchFamily="34" charset="0"/>
+              </a:rPr>
+              <a:t>ров </a:t>
+            </a:r>
+            <a:r>
+              <a:rPr lang="ru-RU" sz="1400" i="1" dirty="0">
+                <a:latin typeface="Open Sans" panose="020B0606030504020204" pitchFamily="34" charset="0"/>
+                <a:ea typeface="Open Sans" panose="020B0606030504020204" pitchFamily="34" charset="0"/>
+                <a:cs typeface="Open Sans" panose="020B0606030504020204" pitchFamily="34" charset="0"/>
+              </a:rPr>
+              <a:t>(20 м ограничение на строительство)</a:t>
+            </a:r>
+            <a:r>
+              <a:rPr lang="ru-RU" sz="1400" b="1" dirty="0">
+                <a:solidFill>
+                  <a:srgbClr val="C00000"/>
+                </a:solidFill>
+                <a:latin typeface="Open Sans" panose="020B0606030504020204" pitchFamily="34" charset="0"/>
+                <a:ea typeface="Open Sans" panose="020B0606030504020204" pitchFamily="34" charset="0"/>
+                <a:cs typeface="Open Sans" panose="020B0606030504020204" pitchFamily="34" charset="0"/>
+              </a:rPr>
+              <a:t> </a:t>
+            </a:r>
+            <a:endParaRPr lang="en-US" sz="1400" dirty="0">
+              <a:solidFill>
+                <a:srgbClr val="C00000"/>
+              </a:solidFill>
+              <a:latin typeface="Open Sans" panose="020B0606030504020204" pitchFamily="34" charset="0"/>
+              <a:ea typeface="Open Sans" panose="020B0606030504020204" pitchFamily="34" charset="0"/>
+              <a:cs typeface="Open Sans" panose="020B0606030504020204" pitchFamily="34" charset="0"/>
+            </a:endParaRPr>
+          </a:p>
+        </p:txBody>
+      </p:sp>
     </p:spTree>
     <p:extLst>
       <p:ext uri="{BB962C8B-B14F-4D97-AF65-F5344CB8AC3E}">
@@ -5601,7 +6226,51 @@
                 <a:ea typeface="Open Sans" panose="020B0606030504020204" pitchFamily="34" charset="0"/>
                 <a:cs typeface="Open Sans" panose="020B0606030504020204" pitchFamily="34" charset="0"/>
               </a:rPr>
-              <a:t>Участок попадает в прибрежную защитную полосу реки Истра. Строительство капитального жилого дома в этой зоне </a:t>
+              <a:t>Участок попадает в прибрежную защитную полосу </a:t>
+            </a:r>
+            <a:r>
+              <a:rPr lang="en-US" sz="1100" dirty="0" err="1">
+                <a:solidFill>
+                  <a:srgbClr val="443728"/>
+                </a:solidFill>
+                <a:latin typeface="Open Sans" panose="020B0606030504020204" pitchFamily="34" charset="0"/>
+                <a:ea typeface="Open Sans" panose="020B0606030504020204" pitchFamily="34" charset="0"/>
+                <a:cs typeface="Open Sans" panose="020B0606030504020204" pitchFamily="34" charset="0"/>
+              </a:rPr>
+              <a:t>реки</a:t>
+            </a:r>
+            <a:r>
+              <a:rPr lang="en-US" sz="1100" dirty="0">
+                <a:solidFill>
+                  <a:srgbClr val="443728"/>
+                </a:solidFill>
+                <a:latin typeface="Open Sans" panose="020B0606030504020204" pitchFamily="34" charset="0"/>
+                <a:ea typeface="Open Sans" panose="020B0606030504020204" pitchFamily="34" charset="0"/>
+                <a:cs typeface="Open Sans" panose="020B0606030504020204" pitchFamily="34" charset="0"/>
+              </a:rPr>
+              <a:t> </a:t>
+            </a:r>
+            <a:r>
+              <a:rPr lang="ru-RU" sz="1100" dirty="0">
+                <a:solidFill>
+                  <a:srgbClr val="443728"/>
+                </a:solidFill>
+                <a:latin typeface="Open Sans" panose="020B0606030504020204" pitchFamily="34" charset="0"/>
+                <a:ea typeface="Open Sans" panose="020B0606030504020204" pitchFamily="34" charset="0"/>
+                <a:cs typeface="Open Sans" panose="020B0606030504020204" pitchFamily="34" charset="0"/>
+              </a:rPr>
+              <a:t>Ямуги</a:t>
+            </a:r>
+            <a:r>
+              <a:rPr lang="en-US" sz="1100" dirty="0">
+                <a:solidFill>
+                  <a:srgbClr val="443728"/>
+                </a:solidFill>
+                <a:latin typeface="Open Sans" panose="020B0606030504020204" pitchFamily="34" charset="0"/>
+                <a:ea typeface="Open Sans" panose="020B0606030504020204" pitchFamily="34" charset="0"/>
+                <a:cs typeface="Open Sans" panose="020B0606030504020204" pitchFamily="34" charset="0"/>
+              </a:rPr>
+              <a:t>. Строительство капитального жилого дома в этой зоне </a:t>
             </a:r>
             <a:r>
               <a:rPr lang="en-US" sz="1100" b="1" dirty="0">
@@ -5862,6 +6531,17 @@
               <a:t>Расстояние от границы участка до линии электропередачи — </a:t>
             </a:r>
             <a:r>
+              <a:rPr lang="ru-RU" sz="1100" b="1" dirty="0">
+                <a:solidFill>
+                  <a:srgbClr val="443728"/>
+                </a:solidFill>
+                <a:latin typeface="Open Sans" panose="020B0606030504020204" pitchFamily="34" charset="0"/>
+                <a:ea typeface="Open Sans" panose="020B0606030504020204" pitchFamily="34" charset="0"/>
+                <a:cs typeface="Open Sans" panose="020B0606030504020204" pitchFamily="34" charset="0"/>
+              </a:rPr>
+              <a:t>15</a:t>
+            </a:r>
+            <a:r>
               <a:rPr lang="en-US" sz="1100" b="1" dirty="0">
                 <a:solidFill>
                   <a:srgbClr val="443728"/>
@@ -5870,7 +6550,29 @@
                 <a:ea typeface="Open Sans" panose="020B0606030504020204" pitchFamily="34" charset="0"/>
                 <a:cs typeface="Open Sans" panose="020B0606030504020204" pitchFamily="34" charset="0"/>
               </a:rPr>
-              <a:t>41 метр</a:t>
+              <a:t> </a:t>
+            </a:r>
+            <a:r>
+              <a:rPr lang="en-US" sz="1100" b="1" dirty="0" err="1">
+                <a:solidFill>
+                  <a:srgbClr val="443728"/>
+                </a:solidFill>
+                <a:latin typeface="Open Sans" panose="020B0606030504020204" pitchFamily="34" charset="0"/>
+                <a:ea typeface="Open Sans" panose="020B0606030504020204" pitchFamily="34" charset="0"/>
+                <a:cs typeface="Open Sans" panose="020B0606030504020204" pitchFamily="34" charset="0"/>
+              </a:rPr>
+              <a:t>метр</a:t>
+            </a:r>
+            <a:r>
+              <a:rPr lang="ru-RU" sz="1100" b="1" dirty="0" err="1">
+                <a:solidFill>
+                  <a:srgbClr val="443728"/>
+                </a:solidFill>
+                <a:latin typeface="Open Sans" panose="020B0606030504020204" pitchFamily="34" charset="0"/>
+                <a:ea typeface="Open Sans" panose="020B0606030504020204" pitchFamily="34" charset="0"/>
+                <a:cs typeface="Open Sans" panose="020B0606030504020204" pitchFamily="34" charset="0"/>
+              </a:rPr>
+              <a:t>ов</a:t>
             </a:r>
             <a:r>
               <a:rPr lang="en-US" sz="1100" dirty="0">
@@ -5884,6 +6586,17 @@
               <a:t>. Минимально разрешённое расстояние по нормативам — </a:t>
             </a:r>
             <a:r>
+              <a:rPr lang="ru-RU" sz="1100" b="1" dirty="0">
+                <a:solidFill>
+                  <a:srgbClr val="443728"/>
+                </a:solidFill>
+                <a:latin typeface="Open Sans" panose="020B0606030504020204" pitchFamily="34" charset="0"/>
+                <a:ea typeface="Open Sans" panose="020B0606030504020204" pitchFamily="34" charset="0"/>
+                <a:cs typeface="Open Sans" panose="020B0606030504020204" pitchFamily="34" charset="0"/>
+              </a:rPr>
+              <a:t>20</a:t>
+            </a:r>
+            <a:r>
               <a:rPr lang="en-US" sz="1100" b="1" dirty="0">
                 <a:solidFill>
                   <a:srgbClr val="443728"/>
@@ -5892,7 +6605,7 @@
                 <a:ea typeface="Open Sans" panose="020B0606030504020204" pitchFamily="34" charset="0"/>
                 <a:cs typeface="Open Sans" panose="020B0606030504020204" pitchFamily="34" charset="0"/>
               </a:rPr>
-              <a:t>55 метров</a:t>
+              <a:t> метров</a:t>
             </a:r>
             <a:r>
               <a:rPr lang="en-US" sz="1100" dirty="0">
@@ -5903,7 +6616,51 @@
                 <a:ea typeface="Open Sans" panose="020B0606030504020204" pitchFamily="34" charset="0"/>
                 <a:cs typeface="Open Sans" panose="020B0606030504020204" pitchFamily="34" charset="0"/>
               </a:rPr>
-              <a:t>. Нарушение нормы составляет 14 метров. Последствия: банк почти наверняка откажет в ипотеке, а разрешение на строительство получить будет крайне сложно — потребуется согласование с сетевой компанией, которое редко даётся.</a:t>
+              <a:t>. Нарушение нормы </a:t>
+            </a:r>
+            <a:r>
+              <a:rPr lang="en-US" sz="1100" dirty="0" err="1">
+                <a:solidFill>
+                  <a:srgbClr val="443728"/>
+                </a:solidFill>
+                <a:latin typeface="Open Sans" panose="020B0606030504020204" pitchFamily="34" charset="0"/>
+                <a:ea typeface="Open Sans" panose="020B0606030504020204" pitchFamily="34" charset="0"/>
+                <a:cs typeface="Open Sans" panose="020B0606030504020204" pitchFamily="34" charset="0"/>
+              </a:rPr>
+              <a:t>составляет</a:t>
+            </a:r>
+            <a:r>
+              <a:rPr lang="en-US" sz="1100" dirty="0">
+                <a:solidFill>
+                  <a:srgbClr val="443728"/>
+                </a:solidFill>
+                <a:latin typeface="Open Sans" panose="020B0606030504020204" pitchFamily="34" charset="0"/>
+                <a:ea typeface="Open Sans" panose="020B0606030504020204" pitchFamily="34" charset="0"/>
+                <a:cs typeface="Open Sans" panose="020B0606030504020204" pitchFamily="34" charset="0"/>
+              </a:rPr>
+              <a:t> </a:t>
+            </a:r>
+            <a:r>
+              <a:rPr lang="ru-RU" sz="1100" dirty="0">
+                <a:solidFill>
+                  <a:srgbClr val="443728"/>
+                </a:solidFill>
+                <a:latin typeface="Open Sans" panose="020B0606030504020204" pitchFamily="34" charset="0"/>
+                <a:ea typeface="Open Sans" panose="020B0606030504020204" pitchFamily="34" charset="0"/>
+                <a:cs typeface="Open Sans" panose="020B0606030504020204" pitchFamily="34" charset="0"/>
+              </a:rPr>
+              <a:t>5</a:t>
+            </a:r>
+            <a:r>
+              <a:rPr lang="en-US" sz="1100" dirty="0">
+                <a:solidFill>
+                  <a:srgbClr val="443728"/>
+                </a:solidFill>
+                <a:latin typeface="Open Sans" panose="020B0606030504020204" pitchFamily="34" charset="0"/>
+                <a:ea typeface="Open Sans" panose="020B0606030504020204" pitchFamily="34" charset="0"/>
+                <a:cs typeface="Open Sans" panose="020B0606030504020204" pitchFamily="34" charset="0"/>
+              </a:rPr>
+              <a:t> метров. Последствия: банк почти наверняка откажет в ипотеке, а разрешение на строительство получить будет крайне сложно — потребуется согласование с сетевой компанией, которое редко даётся.</a:t>
             </a:r>
             <a:endParaRPr lang="en-US" sz="1100" dirty="0">
               <a:latin typeface="Open Sans" panose="020B0606030504020204" pitchFamily="34" charset="0"/>
@@ -9052,7 +9809,29 @@
                 <a:ea typeface="Open Sans" panose="020B0606030504020204" pitchFamily="34" charset="0"/>
                 <a:cs typeface="Open Sans" panose="020B0606030504020204" pitchFamily="34" charset="0"/>
               </a:rPr>
-              <a:t>Генеральный план и ПЗЗ Истринского городского округа</a:t>
+              <a:t>Генеральный план и ПЗЗ </a:t>
+            </a:r>
+            <a:r>
+              <a:rPr lang="ru-RU" sz="1200" b="1" dirty="0">
+                <a:solidFill>
+                  <a:srgbClr val="443728"/>
+                </a:solidFill>
+                <a:latin typeface="Open Sans" panose="020B0606030504020204" pitchFamily="34" charset="0"/>
+                <a:ea typeface="Open Sans" panose="020B0606030504020204" pitchFamily="34" charset="0"/>
+                <a:cs typeface="Open Sans" panose="020B0606030504020204" pitchFamily="34" charset="0"/>
+              </a:rPr>
+              <a:t>Клинского</a:t>
+            </a:r>
+            <a:r>
+              <a:rPr lang="en-US" sz="1200" b="1" dirty="0">
+                <a:solidFill>
+                  <a:srgbClr val="443728"/>
+                </a:solidFill>
+                <a:latin typeface="Open Sans" panose="020B0606030504020204" pitchFamily="34" charset="0"/>
+                <a:ea typeface="Open Sans" panose="020B0606030504020204" pitchFamily="34" charset="0"/>
+                <a:cs typeface="Open Sans" panose="020B0606030504020204" pitchFamily="34" charset="0"/>
+              </a:rPr>
+              <a:t> городского округа</a:t>
             </a:r>
             <a:endParaRPr lang="en-US" sz="1200" dirty="0">
               <a:latin typeface="Open Sans" panose="020B0606030504020204" pitchFamily="34" charset="0"/>
@@ -10978,15 +11757,26 @@
               </a:lnSpc>
             </a:pPr>
             <a:r>
-              <a:rPr lang="en-US" sz="950" dirty="0">
-                <a:solidFill>
-                  <a:srgbClr val="443728"/>
-                </a:solidFill>
-                <a:latin typeface="Open Sans" panose="020B0606030504020204" pitchFamily="34" charset="0"/>
-                <a:ea typeface="Open Sans" panose="020B0606030504020204" pitchFamily="34" charset="0"/>
-                <a:cs typeface="Open Sans" panose="020B0606030504020204" pitchFamily="34" charset="0"/>
-              </a:rPr>
-              <a:t>50:21:0040211:1234</a:t>
+              <a:rPr lang="en-US" sz="1000" dirty="0">
+                <a:solidFill>
+                  <a:srgbClr val="443728"/>
+                </a:solidFill>
+                <a:latin typeface="Open Sans" pitchFamily="34" charset="0"/>
+                <a:ea typeface="Open Sans" pitchFamily="34" charset="-122"/>
+                <a:cs typeface="Open Sans" pitchFamily="34" charset="-120"/>
+              </a:rPr>
+              <a:t>50:</a:t>
+            </a:r>
+            <a:r>
+              <a:rPr lang="ru-RU" sz="1000" dirty="0">
+                <a:solidFill>
+                  <a:srgbClr val="443728"/>
+                </a:solidFill>
+                <a:latin typeface="Open Sans" pitchFamily="34" charset="0"/>
+                <a:ea typeface="Open Sans" pitchFamily="34" charset="-122"/>
+                <a:cs typeface="Open Sans" pitchFamily="34" charset="-120"/>
+              </a:rPr>
+              <a:t>03:0020136:54</a:t>
             </a:r>
             <a:endParaRPr lang="en-US" sz="950" dirty="0">
               <a:latin typeface="Open Sans" panose="020B0606030504020204" pitchFamily="34" charset="0"/>
